--- a/make_presentation/templates/templates/creative/no_logo_9.pptx
+++ b/make_presentation/templates/templates/creative/no_logo_9.pptx
@@ -75,19 +75,7 @@
               <a:rPr b="0" lang="en-US" sz="4400" spc="-1" strike="noStrike">
                 <a:latin typeface="Arial"/>
               </a:rPr>
-              <a:t>Click to </a:t>
-            </a:r>
-            <a:r>
-              <a:rPr b="0" lang="en-US" sz="4400" spc="-1" strike="noStrike">
-                <a:latin typeface="Arial"/>
-              </a:rPr>
-              <a:t>move </a:t>
-            </a:r>
-            <a:r>
-              <a:rPr b="0" lang="en-US" sz="4400" spc="-1" strike="noStrike">
-                <a:latin typeface="Arial"/>
-              </a:rPr>
-              <a:t>the slide</a:t>
+              <a:t>Click to move the slide</a:t>
             </a:r>
             <a:endParaRPr b="0" lang="en-US" sz="4400" spc="-1" strike="noStrike">
               <a:latin typeface="Arial"/>
@@ -127,13 +115,7 @@
               <a:rPr b="0" lang="en-US" sz="2000" spc="-1" strike="noStrike">
                 <a:latin typeface="Arial"/>
               </a:rPr>
-              <a:t>Click to edit the </a:t>
-            </a:r>
-            <a:r>
-              <a:rPr b="0" lang="en-US" sz="2000" spc="-1" strike="noStrike">
-                <a:latin typeface="Arial"/>
-              </a:rPr>
-              <a:t>notes format</a:t>
+              <a:t>Click to edit the notes format</a:t>
             </a:r>
             <a:endParaRPr b="0" lang="en-US" sz="2000" spc="-1" strike="noStrike">
               <a:latin typeface="Arial"/>
@@ -318,7 +300,7 @@
             <a:pPr algn="r">
               <a:buNone/>
             </a:pPr>
-            <a:fld id="{7473A42A-49F4-4D15-BC44-661DAD12453F}" type="slidenum">
+            <a:fld id="{D26155EF-E231-4F4F-A0EF-82072D710D80}" type="slidenum">
               <a:rPr b="0" lang="en-US" sz="1400" spc="-1" strike="noStrike">
                 <a:latin typeface="Times New Roman"/>
               </a:rPr>
@@ -366,7 +348,7 @@
         <p:spPr>
           <a:xfrm>
             <a:off x="685800" y="1143000"/>
-            <a:ext cx="5485680" cy="3085560"/>
+            <a:ext cx="5485320" cy="3085200"/>
           </a:xfrm>
           <a:prstGeom prst="rect">
             <a:avLst/>
@@ -389,7 +371,7 @@
         <p:spPr>
           <a:xfrm>
             <a:off x="685800" y="4400640"/>
-            <a:ext cx="5485680" cy="3599640"/>
+            <a:ext cx="5485320" cy="3599280"/>
           </a:xfrm>
           <a:prstGeom prst="rect">
             <a:avLst/>
@@ -423,7 +405,7 @@
         <p:spPr>
           <a:xfrm>
             <a:off x="3884760" y="8685360"/>
-            <a:ext cx="2971080" cy="457920"/>
+            <a:ext cx="2970720" cy="457560"/>
           </a:xfrm>
           <a:prstGeom prst="rect">
             <a:avLst/>
@@ -455,7 +437,7 @@
               </a:lnSpc>
               <a:buNone/>
             </a:pPr>
-            <a:fld id="{5C397199-CC1E-4B23-B2C1-E20EB73866CB}" type="slidenum">
+            <a:fld id="{6DDCA036-3DFB-4CBF-BBB5-45A9F99A824C}" type="slidenum">
               <a:rPr b="0" lang="ru-RU" sz="1200" spc="-1" strike="noStrike">
                 <a:latin typeface="Times New Roman"/>
               </a:rPr>
@@ -502,7 +484,7 @@
         <p:spPr>
           <a:xfrm>
             <a:off x="685800" y="1143000"/>
-            <a:ext cx="5485680" cy="3085560"/>
+            <a:ext cx="5485320" cy="3085200"/>
           </a:xfrm>
           <a:prstGeom prst="rect">
             <a:avLst/>
@@ -525,7 +507,7 @@
         <p:spPr>
           <a:xfrm>
             <a:off x="685800" y="4400640"/>
-            <a:ext cx="5485680" cy="3599640"/>
+            <a:ext cx="5485320" cy="3599280"/>
           </a:xfrm>
           <a:prstGeom prst="rect">
             <a:avLst/>
@@ -559,7 +541,7 @@
         <p:spPr>
           <a:xfrm>
             <a:off x="3884760" y="8685360"/>
-            <a:ext cx="2971080" cy="457920"/>
+            <a:ext cx="2970720" cy="457560"/>
           </a:xfrm>
           <a:prstGeom prst="rect">
             <a:avLst/>
@@ -591,7 +573,7 @@
               </a:lnSpc>
               <a:buNone/>
             </a:pPr>
-            <a:fld id="{9030E52A-7AB1-4A52-8652-0A317BEB8F42}" type="slidenum">
+            <a:fld id="{22883215-C42F-4C30-940B-02906B381E40}" type="slidenum">
               <a:rPr b="0" lang="ru-RU" sz="1200" spc="-1" strike="noStrike">
                 <a:latin typeface="Times New Roman"/>
               </a:rPr>
@@ -659,7 +641,7 @@
         <p:txBody>
           <a:bodyPr/>
           <a:p>
-            <a:fld id="{BEF68FAE-1B6E-49B2-83FA-610FCBA0032E}" type="slidenum">
+            <a:fld id="{42DC125D-5AFF-4B48-81CB-887AFD4F4150}" type="slidenum">
               <a:t>&lt;#&gt;</a:t>
             </a:fld>
           </a:p>
@@ -721,7 +703,7 @@
         <p:spPr>
           <a:xfrm>
             <a:off x="1143000" y="841680"/>
-            <a:ext cx="6857280" cy="1789920"/>
+            <a:ext cx="6856920" cy="1789560"/>
           </a:xfrm>
           <a:prstGeom prst="rect">
             <a:avLst/>
@@ -758,7 +740,7 @@
         <p:spPr>
           <a:xfrm>
             <a:off x="457200" y="1203480"/>
-            <a:ext cx="8229240" cy="1422720"/>
+            <a:ext cx="8228880" cy="1422360"/>
           </a:xfrm>
           <a:prstGeom prst="rect">
             <a:avLst/>
@@ -791,8 +773,8 @@
         </p:nvSpPr>
         <p:spPr>
           <a:xfrm>
-            <a:off x="457200" y="2761920"/>
-            <a:ext cx="8229240" cy="1422720"/>
+            <a:off x="457200" y="2761200"/>
+            <a:ext cx="8228880" cy="1422360"/>
           </a:xfrm>
           <a:prstGeom prst="rect">
             <a:avLst/>
@@ -847,7 +829,7 @@
         <p:txBody>
           <a:bodyPr/>
           <a:p>
-            <a:fld id="{AC77DD03-ADD7-4F3E-92D0-3006541B40DA}" type="slidenum">
+            <a:fld id="{2846A698-6D75-47E9-97EA-C6E0F2672326}" type="slidenum">
               <a:t>&lt;#&gt;</a:t>
             </a:fld>
           </a:p>
@@ -909,7 +891,7 @@
         <p:spPr>
           <a:xfrm>
             <a:off x="1143000" y="841680"/>
-            <a:ext cx="6857280" cy="1789920"/>
+            <a:ext cx="6856920" cy="1789560"/>
           </a:xfrm>
           <a:prstGeom prst="rect">
             <a:avLst/>
@@ -946,7 +928,7 @@
         <p:spPr>
           <a:xfrm>
             <a:off x="457200" y="1203480"/>
-            <a:ext cx="4015800" cy="1422720"/>
+            <a:ext cx="4015440" cy="1422360"/>
           </a:xfrm>
           <a:prstGeom prst="rect">
             <a:avLst/>
@@ -979,8 +961,8 @@
         </p:nvSpPr>
         <p:spPr>
           <a:xfrm>
-            <a:off x="4674240" y="1203480"/>
-            <a:ext cx="4015800" cy="1422720"/>
+            <a:off x="4673880" y="1203480"/>
+            <a:ext cx="4015440" cy="1422360"/>
           </a:xfrm>
           <a:prstGeom prst="rect">
             <a:avLst/>
@@ -1013,8 +995,8 @@
         </p:nvSpPr>
         <p:spPr>
           <a:xfrm>
-            <a:off x="457200" y="2761920"/>
-            <a:ext cx="4015800" cy="1422720"/>
+            <a:off x="457200" y="2761200"/>
+            <a:ext cx="4015440" cy="1422360"/>
           </a:xfrm>
           <a:prstGeom prst="rect">
             <a:avLst/>
@@ -1047,8 +1029,8 @@
         </p:nvSpPr>
         <p:spPr>
           <a:xfrm>
-            <a:off x="4674240" y="2761920"/>
-            <a:ext cx="4015800" cy="1422720"/>
+            <a:off x="4673880" y="2761200"/>
+            <a:ext cx="4015440" cy="1422360"/>
           </a:xfrm>
           <a:prstGeom prst="rect">
             <a:avLst/>
@@ -1103,7 +1085,7 @@
         <p:txBody>
           <a:bodyPr/>
           <a:p>
-            <a:fld id="{7B3C2BC7-002B-4475-8C2B-63505D5E6E35}" type="slidenum">
+            <a:fld id="{F8A20308-3495-485B-8A4C-606B86954097}" type="slidenum">
               <a:t>&lt;#&gt;</a:t>
             </a:fld>
           </a:p>
@@ -1165,7 +1147,7 @@
         <p:spPr>
           <a:xfrm>
             <a:off x="1143000" y="841680"/>
-            <a:ext cx="6857280" cy="1789920"/>
+            <a:ext cx="6856920" cy="1789560"/>
           </a:xfrm>
           <a:prstGeom prst="rect">
             <a:avLst/>
@@ -1202,7 +1184,7 @@
         <p:spPr>
           <a:xfrm>
             <a:off x="457200" y="1203480"/>
-            <a:ext cx="2649600" cy="1422720"/>
+            <a:ext cx="2649600" cy="1422360"/>
           </a:xfrm>
           <a:prstGeom prst="rect">
             <a:avLst/>
@@ -1236,7 +1218,7 @@
         <p:spPr>
           <a:xfrm>
             <a:off x="3239640" y="1203480"/>
-            <a:ext cx="2649600" cy="1422720"/>
+            <a:ext cx="2649600" cy="1422360"/>
           </a:xfrm>
           <a:prstGeom prst="rect">
             <a:avLst/>
@@ -1270,7 +1252,7 @@
         <p:spPr>
           <a:xfrm>
             <a:off x="6022080" y="1203480"/>
-            <a:ext cx="2649600" cy="1422720"/>
+            <a:ext cx="2649600" cy="1422360"/>
           </a:xfrm>
           <a:prstGeom prst="rect">
             <a:avLst/>
@@ -1303,8 +1285,8 @@
         </p:nvSpPr>
         <p:spPr>
           <a:xfrm>
-            <a:off x="457200" y="2761920"/>
-            <a:ext cx="2649600" cy="1422720"/>
+            <a:off x="457200" y="2761200"/>
+            <a:ext cx="2649600" cy="1422360"/>
           </a:xfrm>
           <a:prstGeom prst="rect">
             <a:avLst/>
@@ -1337,8 +1319,8 @@
         </p:nvSpPr>
         <p:spPr>
           <a:xfrm>
-            <a:off x="3239640" y="2761920"/>
-            <a:ext cx="2649600" cy="1422720"/>
+            <a:off x="3239640" y="2761200"/>
+            <a:ext cx="2649600" cy="1422360"/>
           </a:xfrm>
           <a:prstGeom prst="rect">
             <a:avLst/>
@@ -1371,8 +1353,8 @@
         </p:nvSpPr>
         <p:spPr>
           <a:xfrm>
-            <a:off x="6022080" y="2761920"/>
-            <a:ext cx="2649600" cy="1422720"/>
+            <a:off x="6022080" y="2761200"/>
+            <a:ext cx="2649600" cy="1422360"/>
           </a:xfrm>
           <a:prstGeom prst="rect">
             <a:avLst/>
@@ -1427,7 +1409,7 @@
         <p:txBody>
           <a:bodyPr/>
           <a:p>
-            <a:fld id="{0BD29673-EC2C-4BC6-B1AF-F688D3D7EEC7}" type="slidenum">
+            <a:fld id="{15DC15CA-FEB7-453F-B0E7-EA04284C48D4}" type="slidenum">
               <a:t>&lt;#&gt;</a:t>
             </a:fld>
           </a:p>
@@ -1489,7 +1471,7 @@
         <p:spPr>
           <a:xfrm>
             <a:off x="1143000" y="841680"/>
-            <a:ext cx="6857280" cy="1789920"/>
+            <a:ext cx="6856920" cy="1789560"/>
           </a:xfrm>
           <a:prstGeom prst="rect">
             <a:avLst/>
@@ -1526,7 +1508,7 @@
         <p:spPr>
           <a:xfrm>
             <a:off x="457200" y="1203480"/>
-            <a:ext cx="8229240" cy="2982960"/>
+            <a:ext cx="8228880" cy="2982600"/>
           </a:xfrm>
           <a:prstGeom prst="rect">
             <a:avLst/>
@@ -1584,7 +1566,7 @@
         <p:txBody>
           <a:bodyPr/>
           <a:p>
-            <a:fld id="{A546FFFD-374E-44EB-B241-ECDCB650479B}" type="slidenum">
+            <a:fld id="{F8A7A0F4-FB9A-4639-A966-8B0BB4C968C6}" type="slidenum">
               <a:t>&lt;#&gt;</a:t>
             </a:fld>
           </a:p>
@@ -1646,7 +1628,7 @@
         <p:spPr>
           <a:xfrm>
             <a:off x="1143000" y="841680"/>
-            <a:ext cx="6857280" cy="1789920"/>
+            <a:ext cx="6856920" cy="1789560"/>
           </a:xfrm>
           <a:prstGeom prst="rect">
             <a:avLst/>
@@ -1683,7 +1665,7 @@
         <p:spPr>
           <a:xfrm>
             <a:off x="457200" y="1203480"/>
-            <a:ext cx="8229240" cy="2982960"/>
+            <a:ext cx="8228880" cy="2982600"/>
           </a:xfrm>
           <a:prstGeom prst="rect">
             <a:avLst/>
@@ -1738,7 +1720,7 @@
         <p:txBody>
           <a:bodyPr/>
           <a:p>
-            <a:fld id="{0096F02D-202C-4DC6-904F-AEEA5F51B4AA}" type="slidenum">
+            <a:fld id="{4ED28BF4-F2E2-4472-9913-421C4972EF8D}" type="slidenum">
               <a:t>&lt;#&gt;</a:t>
             </a:fld>
           </a:p>
@@ -1800,7 +1782,7 @@
         <p:spPr>
           <a:xfrm>
             <a:off x="1143000" y="841680"/>
-            <a:ext cx="6857280" cy="1789920"/>
+            <a:ext cx="6856920" cy="1789560"/>
           </a:xfrm>
           <a:prstGeom prst="rect">
             <a:avLst/>
@@ -1837,7 +1819,7 @@
         <p:spPr>
           <a:xfrm>
             <a:off x="457200" y="1203480"/>
-            <a:ext cx="4015800" cy="2982960"/>
+            <a:ext cx="4015440" cy="2982600"/>
           </a:xfrm>
           <a:prstGeom prst="rect">
             <a:avLst/>
@@ -1870,8 +1852,8 @@
         </p:nvSpPr>
         <p:spPr>
           <a:xfrm>
-            <a:off x="4674240" y="1203480"/>
-            <a:ext cx="4015800" cy="2982960"/>
+            <a:off x="4673880" y="1203480"/>
+            <a:ext cx="4015440" cy="2982600"/>
           </a:xfrm>
           <a:prstGeom prst="rect">
             <a:avLst/>
@@ -1926,7 +1908,7 @@
         <p:txBody>
           <a:bodyPr/>
           <a:p>
-            <a:fld id="{FF03F9DA-FB8A-47B7-A0CF-B451028C1A8D}" type="slidenum">
+            <a:fld id="{D634ABCA-9E85-48F6-9619-A61A399231EF}" type="slidenum">
               <a:t>&lt;#&gt;</a:t>
             </a:fld>
           </a:p>
@@ -1988,7 +1970,7 @@
         <p:spPr>
           <a:xfrm>
             <a:off x="1143000" y="841680"/>
-            <a:ext cx="6857280" cy="1789920"/>
+            <a:ext cx="6856920" cy="1789560"/>
           </a:xfrm>
           <a:prstGeom prst="rect">
             <a:avLst/>
@@ -2046,7 +2028,7 @@
         <p:txBody>
           <a:bodyPr/>
           <a:p>
-            <a:fld id="{882D8E33-6045-4ED0-B2B5-DF53A3120804}" type="slidenum">
+            <a:fld id="{E5D57213-3051-4FEA-85CA-1F300213277B}" type="slidenum">
               <a:t>&lt;#&gt;</a:t>
             </a:fld>
           </a:p>
@@ -2108,7 +2090,7 @@
         <p:spPr>
           <a:xfrm>
             <a:off x="1143000" y="841680"/>
-            <a:ext cx="6857280" cy="8298360"/>
+            <a:ext cx="6856920" cy="8296560"/>
           </a:xfrm>
           <a:prstGeom prst="rect">
             <a:avLst/>
@@ -2166,7 +2148,7 @@
         <p:txBody>
           <a:bodyPr/>
           <a:p>
-            <a:fld id="{C240ECCC-5A16-41D7-998A-FD06CABC0ECA}" type="slidenum">
+            <a:fld id="{B8300CFE-48BE-42EE-9EFC-A6EE74DE139C}" type="slidenum">
               <a:t>&lt;#&gt;</a:t>
             </a:fld>
           </a:p>
@@ -2228,7 +2210,7 @@
         <p:spPr>
           <a:xfrm>
             <a:off x="1143000" y="841680"/>
-            <a:ext cx="6857280" cy="1789920"/>
+            <a:ext cx="6856920" cy="1789560"/>
           </a:xfrm>
           <a:prstGeom prst="rect">
             <a:avLst/>
@@ -2265,7 +2247,7 @@
         <p:spPr>
           <a:xfrm>
             <a:off x="457200" y="1203480"/>
-            <a:ext cx="4015800" cy="1422720"/>
+            <a:ext cx="4015440" cy="1422360"/>
           </a:xfrm>
           <a:prstGeom prst="rect">
             <a:avLst/>
@@ -2298,8 +2280,8 @@
         </p:nvSpPr>
         <p:spPr>
           <a:xfrm>
-            <a:off x="4674240" y="1203480"/>
-            <a:ext cx="4015800" cy="2982960"/>
+            <a:off x="4673880" y="1203480"/>
+            <a:ext cx="4015440" cy="2982600"/>
           </a:xfrm>
           <a:prstGeom prst="rect">
             <a:avLst/>
@@ -2332,8 +2314,8 @@
         </p:nvSpPr>
         <p:spPr>
           <a:xfrm>
-            <a:off x="457200" y="2761920"/>
-            <a:ext cx="4015800" cy="1422720"/>
+            <a:off x="457200" y="2761200"/>
+            <a:ext cx="4015440" cy="1422360"/>
           </a:xfrm>
           <a:prstGeom prst="rect">
             <a:avLst/>
@@ -2388,7 +2370,7 @@
         <p:txBody>
           <a:bodyPr/>
           <a:p>
-            <a:fld id="{406635DF-CAC4-429D-B328-A190FAD88B2A}" type="slidenum">
+            <a:fld id="{D928F30A-EC27-418B-B843-62D3ED044B02}" type="slidenum">
               <a:t>&lt;#&gt;</a:t>
             </a:fld>
           </a:p>
@@ -2450,7 +2432,7 @@
         <p:spPr>
           <a:xfrm>
             <a:off x="1143000" y="841680"/>
-            <a:ext cx="6857280" cy="1789920"/>
+            <a:ext cx="6856920" cy="1789560"/>
           </a:xfrm>
           <a:prstGeom prst="rect">
             <a:avLst/>
@@ -2487,7 +2469,7 @@
         <p:spPr>
           <a:xfrm>
             <a:off x="457200" y="1203480"/>
-            <a:ext cx="4015800" cy="2982960"/>
+            <a:ext cx="4015440" cy="2982600"/>
           </a:xfrm>
           <a:prstGeom prst="rect">
             <a:avLst/>
@@ -2520,8 +2502,8 @@
         </p:nvSpPr>
         <p:spPr>
           <a:xfrm>
-            <a:off x="4674240" y="1203480"/>
-            <a:ext cx="4015800" cy="1422720"/>
+            <a:off x="4673880" y="1203480"/>
+            <a:ext cx="4015440" cy="1422360"/>
           </a:xfrm>
           <a:prstGeom prst="rect">
             <a:avLst/>
@@ -2554,8 +2536,8 @@
         </p:nvSpPr>
         <p:spPr>
           <a:xfrm>
-            <a:off x="4674240" y="2761920"/>
-            <a:ext cx="4015800" cy="1422720"/>
+            <a:off x="4673880" y="2761200"/>
+            <a:ext cx="4015440" cy="1422360"/>
           </a:xfrm>
           <a:prstGeom prst="rect">
             <a:avLst/>
@@ -2610,7 +2592,7 @@
         <p:txBody>
           <a:bodyPr/>
           <a:p>
-            <a:fld id="{E1BD9FF0-EB52-4849-A120-2547FFE5D852}" type="slidenum">
+            <a:fld id="{4025F6FD-7E5E-4BDD-93CE-4D0C5B57211F}" type="slidenum">
               <a:t>&lt;#&gt;</a:t>
             </a:fld>
           </a:p>
@@ -2672,7 +2654,7 @@
         <p:spPr>
           <a:xfrm>
             <a:off x="1143000" y="841680"/>
-            <a:ext cx="6857280" cy="1789920"/>
+            <a:ext cx="6856920" cy="1789560"/>
           </a:xfrm>
           <a:prstGeom prst="rect">
             <a:avLst/>
@@ -2709,7 +2691,7 @@
         <p:spPr>
           <a:xfrm>
             <a:off x="457200" y="1203480"/>
-            <a:ext cx="4015800" cy="1422720"/>
+            <a:ext cx="4015440" cy="1422360"/>
           </a:xfrm>
           <a:prstGeom prst="rect">
             <a:avLst/>
@@ -2742,8 +2724,8 @@
         </p:nvSpPr>
         <p:spPr>
           <a:xfrm>
-            <a:off x="4674240" y="1203480"/>
-            <a:ext cx="4015800" cy="1422720"/>
+            <a:off x="4673880" y="1203480"/>
+            <a:ext cx="4015440" cy="1422360"/>
           </a:xfrm>
           <a:prstGeom prst="rect">
             <a:avLst/>
@@ -2776,8 +2758,8 @@
         </p:nvSpPr>
         <p:spPr>
           <a:xfrm>
-            <a:off x="457200" y="2761920"/>
-            <a:ext cx="8229240" cy="1422720"/>
+            <a:off x="457200" y="2761200"/>
+            <a:ext cx="8228880" cy="1422360"/>
           </a:xfrm>
           <a:prstGeom prst="rect">
             <a:avLst/>
@@ -2832,7 +2814,7 @@
         <p:txBody>
           <a:bodyPr/>
           <a:p>
-            <a:fld id="{F265154D-1DE1-4F84-95DE-83B94254E375}" type="slidenum">
+            <a:fld id="{2AFC55EE-A026-486D-824C-6B3E3399AA2D}" type="slidenum">
               <a:t>&lt;#&gt;</a:t>
             </a:fld>
           </a:p>
@@ -2901,7 +2883,7 @@
         <p:spPr>
           <a:xfrm>
             <a:off x="1143000" y="841680"/>
-            <a:ext cx="6857280" cy="1789920"/>
+            <a:ext cx="6856920" cy="1789560"/>
           </a:xfrm>
           <a:prstGeom prst="rect">
             <a:avLst/>
@@ -2920,85 +2902,7 @@
               <a:rPr b="0" lang="en-US" sz="1800" spc="-1" strike="noStrike">
                 <a:latin typeface="Arial"/>
               </a:rPr>
-              <a:t>Cli</a:t>
-            </a:r>
-            <a:r>
-              <a:rPr b="0" lang="en-US" sz="1800" spc="-1" strike="noStrike">
-                <a:latin typeface="Arial"/>
-              </a:rPr>
-              <a:t>ck </a:t>
-            </a:r>
-            <a:r>
-              <a:rPr b="0" lang="en-US" sz="1800" spc="-1" strike="noStrike">
-                <a:latin typeface="Arial"/>
-              </a:rPr>
-              <a:t>to </a:t>
-            </a:r>
-            <a:r>
-              <a:rPr b="0" lang="en-US" sz="1800" spc="-1" strike="noStrike">
-                <a:latin typeface="Arial"/>
-              </a:rPr>
-              <a:t>edi</a:t>
-            </a:r>
-            <a:r>
-              <a:rPr b="0" lang="en-US" sz="1800" spc="-1" strike="noStrike">
-                <a:latin typeface="Arial"/>
-              </a:rPr>
-              <a:t>t </a:t>
-            </a:r>
-            <a:r>
-              <a:rPr b="0" lang="en-US" sz="1800" spc="-1" strike="noStrike">
-                <a:latin typeface="Arial"/>
-              </a:rPr>
-              <a:t>th</a:t>
-            </a:r>
-            <a:r>
-              <a:rPr b="0" lang="en-US" sz="1800" spc="-1" strike="noStrike">
-                <a:latin typeface="Arial"/>
-              </a:rPr>
-              <a:t>e </a:t>
-            </a:r>
-            <a:r>
-              <a:rPr b="0" lang="en-US" sz="1800" spc="-1" strike="noStrike">
-                <a:latin typeface="Arial"/>
-              </a:rPr>
-              <a:t>titl</a:t>
-            </a:r>
-            <a:r>
-              <a:rPr b="0" lang="en-US" sz="1800" spc="-1" strike="noStrike">
-                <a:latin typeface="Arial"/>
-              </a:rPr>
-              <a:t>e </a:t>
-            </a:r>
-            <a:r>
-              <a:rPr b="0" lang="en-US" sz="1800" spc="-1" strike="noStrike">
-                <a:latin typeface="Arial"/>
-              </a:rPr>
-              <a:t>tex</a:t>
-            </a:r>
-            <a:r>
-              <a:rPr b="0" lang="en-US" sz="1800" spc="-1" strike="noStrike">
-                <a:latin typeface="Arial"/>
-              </a:rPr>
-              <a:t>t </a:t>
-            </a:r>
-            <a:r>
-              <a:rPr b="0" lang="en-US" sz="1800" spc="-1" strike="noStrike">
-                <a:latin typeface="Arial"/>
-              </a:rPr>
-              <a:t>for</a:t>
-            </a:r>
-            <a:r>
-              <a:rPr b="0" lang="en-US" sz="1800" spc="-1" strike="noStrike">
-                <a:latin typeface="Arial"/>
-              </a:rPr>
-              <a:t>m</a:t>
-            </a:r>
-            <a:r>
-              <a:rPr b="0" lang="en-US" sz="1800" spc="-1" strike="noStrike">
-                <a:latin typeface="Arial"/>
-              </a:rPr>
-              <a:t>at</a:t>
+              <a:t>Click to edit the title text format</a:t>
             </a:r>
             <a:endParaRPr b="0" lang="en-US" sz="1800" spc="-1" strike="noStrike">
               <a:latin typeface="Arial"/>
@@ -3013,180 +2917,13 @@
             <a:spLocks noGrp="1"/>
           </p:cNvSpPr>
           <p:nvPr>
-            <p:ph type="ftr" idx="1"/>
-          </p:nvPr>
-        </p:nvSpPr>
-        <p:spPr>
-          <a:xfrm>
-            <a:off x="3029040" y="4767120"/>
-            <a:ext cx="3085560" cy="273240"/>
-          </a:xfrm>
-          <a:prstGeom prst="rect">
-            <a:avLst/>
-          </a:prstGeom>
-          <a:noFill/>
-          <a:ln w="0">
-            <a:noFill/>
-          </a:ln>
-        </p:spPr>
-        <p:txBody>
-          <a:bodyPr lIns="90000" rIns="90000" tIns="45000" bIns="45000" anchor="ctr">
-            <a:noAutofit/>
-          </a:bodyPr>
-          <a:lstStyle>
-            <a:lvl1pPr algn="ctr">
-              <a:lnSpc>
-                <a:spcPct val="100000"/>
-              </a:lnSpc>
-              <a:buNone/>
-              <a:defRPr b="0" lang="en-US" sz="1400" spc="-1" strike="noStrike">
-                <a:latin typeface="Times New Roman"/>
-              </a:defRPr>
-            </a:lvl1pPr>
-          </a:lstStyle>
-          <a:p>
-            <a:pPr algn="ctr">
-              <a:lnSpc>
-                <a:spcPct val="100000"/>
-              </a:lnSpc>
-              <a:buNone/>
-            </a:pPr>
-            <a:r>
-              <a:rPr b="0" lang="en-US" sz="1400" spc="-1" strike="noStrike">
-                <a:latin typeface="Times New Roman"/>
-              </a:rPr>
-              <a:t>&lt;footer&gt;</a:t>
-            </a:r>
-            <a:endParaRPr b="0" lang="en-US" sz="1400" spc="-1" strike="noStrike">
-              <a:latin typeface="Times New Roman"/>
-            </a:endParaRPr>
-          </a:p>
-        </p:txBody>
-      </p:sp>
-      <p:sp>
-        <p:nvSpPr>
-          <p:cNvPr id="2" name="PlaceHolder 3"/>
-          <p:cNvSpPr>
-            <a:spLocks noGrp="1"/>
-          </p:cNvSpPr>
-          <p:nvPr>
-            <p:ph type="sldNum" idx="2"/>
-          </p:nvPr>
-        </p:nvSpPr>
-        <p:spPr>
-          <a:xfrm>
-            <a:off x="6458040" y="4767120"/>
-            <a:ext cx="2056680" cy="273240"/>
-          </a:xfrm>
-          <a:prstGeom prst="rect">
-            <a:avLst/>
-          </a:prstGeom>
-          <a:noFill/>
-          <a:ln w="0">
-            <a:noFill/>
-          </a:ln>
-        </p:spPr>
-        <p:txBody>
-          <a:bodyPr lIns="90000" rIns="90000" tIns="45000" bIns="45000" anchor="ctr">
-            <a:noAutofit/>
-          </a:bodyPr>
-          <a:lstStyle>
-            <a:lvl1pPr algn="r">
-              <a:lnSpc>
-                <a:spcPct val="100000"/>
-              </a:lnSpc>
-              <a:buNone/>
-              <a:defRPr b="0" lang="en-US" sz="900" spc="-1" strike="noStrike">
-                <a:solidFill>
-                  <a:srgbClr val="8b8b8b"/>
-                </a:solidFill>
-                <a:latin typeface="Calibri"/>
-              </a:defRPr>
-            </a:lvl1pPr>
-          </a:lstStyle>
-          <a:p>
-            <a:pPr algn="r">
-              <a:lnSpc>
-                <a:spcPct val="100000"/>
-              </a:lnSpc>
-              <a:buNone/>
-            </a:pPr>
-            <a:fld id="{C37135E7-7F0B-4DE0-AB0F-5C1074AE21D6}" type="slidenum">
-              <a:rPr b="0" lang="en-US" sz="900" spc="-1" strike="noStrike">
-                <a:solidFill>
-                  <a:srgbClr val="8b8b8b"/>
-                </a:solidFill>
-                <a:latin typeface="Calibri"/>
-              </a:rPr>
-              <a:t>&lt;number&gt;</a:t>
-            </a:fld>
-            <a:endParaRPr b="0" lang="en-US" sz="900" spc="-1" strike="noStrike">
-              <a:latin typeface="Times New Roman"/>
-            </a:endParaRPr>
-          </a:p>
-        </p:txBody>
-      </p:sp>
-      <p:sp>
-        <p:nvSpPr>
-          <p:cNvPr id="3" name="PlaceHolder 4"/>
-          <p:cNvSpPr>
-            <a:spLocks noGrp="1"/>
-          </p:cNvSpPr>
-          <p:nvPr>
-            <p:ph type="dt" idx="3"/>
-          </p:nvPr>
-        </p:nvSpPr>
-        <p:spPr>
-          <a:xfrm>
-            <a:off x="628560" y="4767120"/>
-            <a:ext cx="2056680" cy="273240"/>
-          </a:xfrm>
-          <a:prstGeom prst="rect">
-            <a:avLst/>
-          </a:prstGeom>
-          <a:noFill/>
-          <a:ln w="0">
-            <a:noFill/>
-          </a:ln>
-        </p:spPr>
-        <p:txBody>
-          <a:bodyPr lIns="90000" rIns="90000" tIns="45000" bIns="45000" anchor="ctr">
-            <a:noAutofit/>
-          </a:bodyPr>
-          <a:lstStyle>
-            <a:lvl1pPr>
-              <a:defRPr b="0" lang="en-US" sz="1400" spc="-1" strike="noStrike">
-                <a:latin typeface="Times New Roman"/>
-              </a:defRPr>
-            </a:lvl1pPr>
-          </a:lstStyle>
-          <a:p>
-            <a:r>
-              <a:rPr b="0" lang="en-US" sz="1400" spc="-1" strike="noStrike">
-                <a:latin typeface="Times New Roman"/>
-              </a:rPr>
-              <a:t>&lt;date/time&gt;</a:t>
-            </a:r>
-            <a:endParaRPr b="0" lang="en-US" sz="1400" spc="-1" strike="noStrike">
-              <a:latin typeface="Times New Roman"/>
-            </a:endParaRPr>
-          </a:p>
-        </p:txBody>
-      </p:sp>
-      <p:sp>
-        <p:nvSpPr>
-          <p:cNvPr id="4" name="PlaceHolder 5"/>
-          <p:cNvSpPr>
-            <a:spLocks noGrp="1"/>
-          </p:cNvSpPr>
-          <p:nvPr>
             <p:ph type="body"/>
           </p:nvPr>
         </p:nvSpPr>
         <p:spPr>
           <a:xfrm>
             <a:off x="457200" y="1203480"/>
-            <a:ext cx="8229240" cy="2982960"/>
+            <a:ext cx="8228880" cy="2982600"/>
           </a:xfrm>
           <a:prstGeom prst="rect">
             <a:avLst/>
@@ -3213,12 +2950,12 @@
               <a:buChar char=""/>
             </a:pPr>
             <a:r>
-              <a:rPr b="0" lang="en-US" sz="3200" spc="-1" strike="noStrike">
+              <a:rPr b="0" lang="en-US" sz="1800" spc="-1" strike="noStrike">
                 <a:latin typeface="Arial"/>
               </a:rPr>
               <a:t>Click to edit the outline text format</a:t>
             </a:r>
-            <a:endParaRPr b="0" lang="en-US" sz="3200" spc="-1" strike="noStrike">
+            <a:endParaRPr b="0" lang="en-US" sz="1800" spc="-1" strike="noStrike">
               <a:latin typeface="Arial"/>
             </a:endParaRPr>
           </a:p>
@@ -3235,12 +2972,12 @@
               <a:buChar char=""/>
             </a:pPr>
             <a:r>
-              <a:rPr b="0" lang="en-US" sz="2800" spc="-1" strike="noStrike">
+              <a:rPr b="0" lang="en-US" sz="1800" spc="-1" strike="noStrike">
                 <a:latin typeface="Arial"/>
               </a:rPr>
               <a:t>Second Outline Level</a:t>
             </a:r>
-            <a:endParaRPr b="0" lang="en-US" sz="2800" spc="-1" strike="noStrike">
+            <a:endParaRPr b="0" lang="en-US" sz="1800" spc="-1" strike="noStrike">
               <a:latin typeface="Arial"/>
             </a:endParaRPr>
           </a:p>
@@ -3257,12 +2994,12 @@
               <a:buChar char=""/>
             </a:pPr>
             <a:r>
-              <a:rPr b="0" lang="en-US" sz="2400" spc="-1" strike="noStrike">
+              <a:rPr b="0" lang="en-US" sz="1800" spc="-1" strike="noStrike">
                 <a:latin typeface="Arial"/>
               </a:rPr>
               <a:t>Third Outline Level</a:t>
             </a:r>
-            <a:endParaRPr b="0" lang="en-US" sz="2400" spc="-1" strike="noStrike">
+            <a:endParaRPr b="0" lang="en-US" sz="1800" spc="-1" strike="noStrike">
               <a:latin typeface="Arial"/>
             </a:endParaRPr>
           </a:p>
@@ -3279,12 +3016,12 @@
               <a:buChar char=""/>
             </a:pPr>
             <a:r>
-              <a:rPr b="0" lang="en-US" sz="2000" spc="-1" strike="noStrike">
+              <a:rPr b="0" lang="en-US" sz="1800" spc="-1" strike="noStrike">
                 <a:latin typeface="Arial"/>
               </a:rPr>
               <a:t>Fourth Outline Level</a:t>
             </a:r>
-            <a:endParaRPr b="0" lang="en-US" sz="2000" spc="-1" strike="noStrike">
+            <a:endParaRPr b="0" lang="en-US" sz="1800" spc="-1" strike="noStrike">
               <a:latin typeface="Arial"/>
             </a:endParaRPr>
           </a:p>
@@ -3301,12 +3038,12 @@
               <a:buChar char=""/>
             </a:pPr>
             <a:r>
-              <a:rPr b="0" lang="en-US" sz="2000" spc="-1" strike="noStrike">
+              <a:rPr b="0" lang="en-US" sz="1800" spc="-1" strike="noStrike">
                 <a:latin typeface="Arial"/>
               </a:rPr>
               <a:t>Fifth Outline Level</a:t>
             </a:r>
-            <a:endParaRPr b="0" lang="en-US" sz="2000" spc="-1" strike="noStrike">
+            <a:endParaRPr b="0" lang="en-US" sz="1800" spc="-1" strike="noStrike">
               <a:latin typeface="Arial"/>
             </a:endParaRPr>
           </a:p>
@@ -3323,12 +3060,12 @@
               <a:buChar char=""/>
             </a:pPr>
             <a:r>
-              <a:rPr b="0" lang="en-US" sz="2000" spc="-1" strike="noStrike">
+              <a:rPr b="0" lang="en-US" sz="1800" spc="-1" strike="noStrike">
                 <a:latin typeface="Arial"/>
               </a:rPr>
               <a:t>Sixth Outline Level</a:t>
             </a:r>
-            <a:endParaRPr b="0" lang="en-US" sz="2000" spc="-1" strike="noStrike">
+            <a:endParaRPr b="0" lang="en-US" sz="1800" spc="-1" strike="noStrike">
               <a:latin typeface="Arial"/>
             </a:endParaRPr>
           </a:p>
@@ -3345,13 +3082,180 @@
               <a:buChar char=""/>
             </a:pPr>
             <a:r>
-              <a:rPr b="0" lang="en-US" sz="2000" spc="-1" strike="noStrike">
+              <a:rPr b="0" lang="en-US" sz="1800" spc="-1" strike="noStrike">
                 <a:latin typeface="Arial"/>
               </a:rPr>
               <a:t>Seventh Outline Level</a:t>
             </a:r>
-            <a:endParaRPr b="0" lang="en-US" sz="2000" spc="-1" strike="noStrike">
-              <a:latin typeface="Arial"/>
+            <a:endParaRPr b="0" lang="en-US" sz="1800" spc="-1" strike="noStrike">
+              <a:latin typeface="Arial"/>
+            </a:endParaRPr>
+          </a:p>
+        </p:txBody>
+      </p:sp>
+      <p:sp>
+        <p:nvSpPr>
+          <p:cNvPr id="2" name="PlaceHolder 3"/>
+          <p:cNvSpPr>
+            <a:spLocks noGrp="1"/>
+          </p:cNvSpPr>
+          <p:nvPr>
+            <p:ph type="ftr" idx="1"/>
+          </p:nvPr>
+        </p:nvSpPr>
+        <p:spPr>
+          <a:xfrm>
+            <a:off x="3029040" y="4767120"/>
+            <a:ext cx="3085200" cy="272880"/>
+          </a:xfrm>
+          <a:prstGeom prst="rect">
+            <a:avLst/>
+          </a:prstGeom>
+          <a:noFill/>
+          <a:ln w="0">
+            <a:noFill/>
+          </a:ln>
+        </p:spPr>
+        <p:txBody>
+          <a:bodyPr lIns="90000" rIns="90000" tIns="45000" bIns="45000" anchor="ctr">
+            <a:noAutofit/>
+          </a:bodyPr>
+          <a:lstStyle>
+            <a:lvl1pPr algn="ctr">
+              <a:lnSpc>
+                <a:spcPct val="100000"/>
+              </a:lnSpc>
+              <a:buNone/>
+              <a:defRPr b="0" lang="en-US" sz="1400" spc="-1" strike="noStrike">
+                <a:latin typeface="Times New Roman"/>
+              </a:defRPr>
+            </a:lvl1pPr>
+          </a:lstStyle>
+          <a:p>
+            <a:pPr algn="ctr">
+              <a:lnSpc>
+                <a:spcPct val="100000"/>
+              </a:lnSpc>
+              <a:buNone/>
+            </a:pPr>
+            <a:r>
+              <a:rPr b="0" lang="en-US" sz="1400" spc="-1" strike="noStrike">
+                <a:latin typeface="Times New Roman"/>
+              </a:rPr>
+              <a:t>&lt;footer&gt;</a:t>
+            </a:r>
+            <a:endParaRPr b="0" lang="en-US" sz="1400" spc="-1" strike="noStrike">
+              <a:latin typeface="Times New Roman"/>
+            </a:endParaRPr>
+          </a:p>
+        </p:txBody>
+      </p:sp>
+      <p:sp>
+        <p:nvSpPr>
+          <p:cNvPr id="3" name="PlaceHolder 4"/>
+          <p:cNvSpPr>
+            <a:spLocks noGrp="1"/>
+          </p:cNvSpPr>
+          <p:nvPr>
+            <p:ph type="sldNum" idx="2"/>
+          </p:nvPr>
+        </p:nvSpPr>
+        <p:spPr>
+          <a:xfrm>
+            <a:off x="6458040" y="4767120"/>
+            <a:ext cx="2056320" cy="272880"/>
+          </a:xfrm>
+          <a:prstGeom prst="rect">
+            <a:avLst/>
+          </a:prstGeom>
+          <a:noFill/>
+          <a:ln w="0">
+            <a:noFill/>
+          </a:ln>
+        </p:spPr>
+        <p:txBody>
+          <a:bodyPr lIns="90000" rIns="90000" tIns="45000" bIns="45000" anchor="ctr">
+            <a:noAutofit/>
+          </a:bodyPr>
+          <a:lstStyle>
+            <a:lvl1pPr algn="r">
+              <a:lnSpc>
+                <a:spcPct val="100000"/>
+              </a:lnSpc>
+              <a:buNone/>
+              <a:defRPr b="0" lang="en-US" sz="900" spc="-1" strike="noStrike">
+                <a:solidFill>
+                  <a:srgbClr val="8b8b8b"/>
+                </a:solidFill>
+                <a:latin typeface="Calibri"/>
+              </a:defRPr>
+            </a:lvl1pPr>
+          </a:lstStyle>
+          <a:p>
+            <a:pPr algn="r">
+              <a:lnSpc>
+                <a:spcPct val="100000"/>
+              </a:lnSpc>
+              <a:buNone/>
+            </a:pPr>
+            <a:fld id="{34C0F0D1-16B6-4314-BD5C-EDA711E28C33}" type="slidenum">
+              <a:rPr b="0" lang="en-US" sz="900" spc="-1" strike="noStrike">
+                <a:solidFill>
+                  <a:srgbClr val="8b8b8b"/>
+                </a:solidFill>
+                <a:latin typeface="Calibri"/>
+              </a:rPr>
+              <a:t>&lt;number&gt;</a:t>
+            </a:fld>
+            <a:endParaRPr b="0" lang="en-US" sz="900" spc="-1" strike="noStrike">
+              <a:latin typeface="Times New Roman"/>
+            </a:endParaRPr>
+          </a:p>
+        </p:txBody>
+      </p:sp>
+      <p:sp>
+        <p:nvSpPr>
+          <p:cNvPr id="4" name="PlaceHolder 5"/>
+          <p:cNvSpPr>
+            <a:spLocks noGrp="1"/>
+          </p:cNvSpPr>
+          <p:nvPr>
+            <p:ph type="dt" idx="3"/>
+          </p:nvPr>
+        </p:nvSpPr>
+        <p:spPr>
+          <a:xfrm>
+            <a:off x="628560" y="4767120"/>
+            <a:ext cx="2056320" cy="272880"/>
+          </a:xfrm>
+          <a:prstGeom prst="rect">
+            <a:avLst/>
+          </a:prstGeom>
+          <a:noFill/>
+          <a:ln w="0">
+            <a:noFill/>
+          </a:ln>
+        </p:spPr>
+        <p:txBody>
+          <a:bodyPr lIns="90000" rIns="90000" tIns="45000" bIns="45000" anchor="ctr">
+            <a:noAutofit/>
+          </a:bodyPr>
+          <a:lstStyle>
+            <a:lvl1pPr>
+              <a:defRPr b="0" lang="en-US" sz="1400" spc="-1" strike="noStrike">
+                <a:latin typeface="Times New Roman"/>
+              </a:defRPr>
+            </a:lvl1pPr>
+          </a:lstStyle>
+          <a:p>
+            <a:r>
+              <a:rPr b="0" lang="en-US" sz="1400" spc="-1" strike="noStrike">
+                <a:latin typeface="Times New Roman"/>
+              </a:rPr>
+              <a:t>&lt;date/time&gt;</a:t>
+            </a:r>
+            <a:endParaRPr b="0" lang="en-US" sz="1400" spc="-1" strike="noStrike">
+              <a:latin typeface="Times New Roman"/>
             </a:endParaRPr>
           </a:p>
         </p:txBody>
@@ -3402,7 +3306,7 @@
         <p:spPr>
           <a:xfrm>
             <a:off x="186840" y="178200"/>
-            <a:ext cx="8769960" cy="4757760"/>
+            <a:ext cx="8769600" cy="4757400"/>
           </a:xfrm>
           <a:prstGeom prst="roundRect">
             <a:avLst>
@@ -3440,7 +3344,7 @@
         <p:spPr>
           <a:xfrm>
             <a:off x="460080" y="622080"/>
-            <a:ext cx="6925680" cy="3306600"/>
+            <a:ext cx="6925320" cy="3306240"/>
           </a:xfrm>
           <a:prstGeom prst="rect">
             <a:avLst/>
@@ -3496,7 +3400,7 @@
         <p:spPr>
           <a:xfrm>
             <a:off x="5753880" y="2557440"/>
-            <a:ext cx="4009680" cy="3133080"/>
+            <a:ext cx="4009320" cy="3132720"/>
           </a:xfrm>
           <a:prstGeom prst="rect">
             <a:avLst/>
@@ -3549,7 +3453,7 @@
         <p:spPr>
           <a:xfrm>
             <a:off x="5753880" y="2557440"/>
-            <a:ext cx="4009680" cy="3133080"/>
+            <a:ext cx="4009320" cy="3132720"/>
           </a:xfrm>
           <a:prstGeom prst="rect">
             <a:avLst/>
@@ -3568,7 +3472,7 @@
         <p:spPr>
           <a:xfrm>
             <a:off x="185760" y="831240"/>
-            <a:ext cx="899280" cy="899280"/>
+            <a:ext cx="898920" cy="898920"/>
           </a:xfrm>
           <a:prstGeom prst="ellipse">
             <a:avLst/>
@@ -3628,7 +3532,7 @@
         <p:spPr>
           <a:xfrm>
             <a:off x="185760" y="2381400"/>
-            <a:ext cx="899280" cy="887400"/>
+            <a:ext cx="898920" cy="887040"/>
           </a:xfrm>
           <a:prstGeom prst="ellipse">
             <a:avLst/>
@@ -3688,7 +3592,7 @@
         <p:spPr>
           <a:xfrm>
             <a:off x="185760" y="3860640"/>
-            <a:ext cx="899280" cy="899280"/>
+            <a:ext cx="898920" cy="898920"/>
           </a:xfrm>
           <a:prstGeom prst="ellipse">
             <a:avLst/>
@@ -3748,7 +3652,7 @@
         <p:spPr>
           <a:xfrm>
             <a:off x="967680" y="797040"/>
-            <a:ext cx="3764520" cy="550440"/>
+            <a:ext cx="3764160" cy="550080"/>
           </a:xfrm>
           <a:prstGeom prst="rect">
             <a:avLst/>
@@ -3810,7 +3714,7 @@
         <p:spPr>
           <a:xfrm>
             <a:off x="967680" y="1332720"/>
-            <a:ext cx="3764520" cy="789480"/>
+            <a:ext cx="3764160" cy="789120"/>
           </a:xfrm>
           <a:prstGeom prst="rect">
             <a:avLst/>
@@ -3872,7 +3776,7 @@
         <p:spPr>
           <a:xfrm>
             <a:off x="964080" y="2292480"/>
-            <a:ext cx="3764520" cy="550440"/>
+            <a:ext cx="3764160" cy="550080"/>
           </a:xfrm>
           <a:prstGeom prst="rect">
             <a:avLst/>
@@ -3924,7 +3828,7 @@
         <p:spPr>
           <a:xfrm>
             <a:off x="964080" y="2825280"/>
-            <a:ext cx="3764520" cy="843120"/>
+            <a:ext cx="3764160" cy="842760"/>
           </a:xfrm>
           <a:prstGeom prst="rect">
             <a:avLst/>
@@ -3986,7 +3890,7 @@
         <p:spPr>
           <a:xfrm>
             <a:off x="964080" y="3777840"/>
-            <a:ext cx="3764520" cy="550440"/>
+            <a:ext cx="3764160" cy="550080"/>
           </a:xfrm>
           <a:prstGeom prst="rect">
             <a:avLst/>
@@ -4038,7 +3942,7 @@
         <p:spPr>
           <a:xfrm>
             <a:off x="964080" y="4310640"/>
-            <a:ext cx="3764520" cy="794520"/>
+            <a:ext cx="3764160" cy="794160"/>
           </a:xfrm>
           <a:prstGeom prst="rect">
             <a:avLst/>
@@ -4100,7 +4004,7 @@
         <p:spPr>
           <a:xfrm>
             <a:off x="5084640" y="987840"/>
-            <a:ext cx="3687480" cy="3496680"/>
+            <a:ext cx="3687120" cy="3496320"/>
           </a:xfrm>
           <a:prstGeom prst="roundRect">
             <a:avLst>
@@ -4164,7 +4068,7 @@
         <p:spPr>
           <a:xfrm>
             <a:off x="8519760" y="4831560"/>
-            <a:ext cx="484560" cy="226800"/>
+            <a:ext cx="484200" cy="226800"/>
           </a:xfrm>
           <a:prstGeom prst="rect">
             <a:avLst/>
@@ -4216,7 +4120,7 @@
         <p:spPr>
           <a:xfrm>
             <a:off x="421200" y="228600"/>
-            <a:ext cx="8457840" cy="685440"/>
+            <a:ext cx="8457480" cy="685080"/>
           </a:xfrm>
           <a:prstGeom prst="rect">
             <a:avLst/>
@@ -4245,7 +4149,11 @@
             </a:pPr>
             <a:r>
               <a:rPr b="0" lang="en-US" sz="1800" spc="-1" strike="noStrike">
-                <a:latin typeface="Arial"/>
+                <a:solidFill>
+                  <a:srgbClr val="000000"/>
+                </a:solidFill>
+                <a:latin typeface="Arial"/>
+                <a:ea typeface="DejaVu Sans"/>
               </a:rPr>
               <a:t>TITLE</a:t>
             </a:r>
@@ -4294,7 +4202,7 @@
         <p:spPr>
           <a:xfrm>
             <a:off x="506520" y="1484640"/>
-            <a:ext cx="2556720" cy="2055240"/>
+            <a:ext cx="2556360" cy="2054880"/>
           </a:xfrm>
           <a:prstGeom prst="roundRect">
             <a:avLst>
@@ -4334,7 +4242,7 @@
         <p:spPr>
           <a:xfrm>
             <a:off x="624240" y="1616760"/>
-            <a:ext cx="2289600" cy="729000"/>
+            <a:ext cx="2289240" cy="728640"/>
           </a:xfrm>
           <a:prstGeom prst="rect">
             <a:avLst/>
@@ -4386,7 +4294,7 @@
         <p:spPr>
           <a:xfrm>
             <a:off x="624240" y="2400480"/>
-            <a:ext cx="2289600" cy="1162080"/>
+            <a:ext cx="2289240" cy="1161720"/>
           </a:xfrm>
           <a:prstGeom prst="rect">
             <a:avLst/>
@@ -4448,7 +4356,7 @@
         <p:spPr>
           <a:xfrm>
             <a:off x="3309120" y="2066040"/>
-            <a:ext cx="2556720" cy="2055240"/>
+            <a:ext cx="2556360" cy="2054880"/>
           </a:xfrm>
           <a:prstGeom prst="roundRect">
             <a:avLst>
@@ -4488,7 +4396,7 @@
         <p:spPr>
           <a:xfrm>
             <a:off x="3426840" y="2198160"/>
-            <a:ext cx="2289600" cy="729000"/>
+            <a:ext cx="2289240" cy="728640"/>
           </a:xfrm>
           <a:prstGeom prst="rect">
             <a:avLst/>
@@ -4540,7 +4448,7 @@
         <p:spPr>
           <a:xfrm>
             <a:off x="3426840" y="2981880"/>
-            <a:ext cx="2289600" cy="1162080"/>
+            <a:ext cx="2289240" cy="1161720"/>
           </a:xfrm>
           <a:prstGeom prst="rect">
             <a:avLst/>
@@ -4592,7 +4500,7 @@
         <p:spPr>
           <a:xfrm>
             <a:off x="6111720" y="2659320"/>
-            <a:ext cx="2556720" cy="2055240"/>
+            <a:ext cx="2556360" cy="2054880"/>
           </a:xfrm>
           <a:prstGeom prst="roundRect">
             <a:avLst>
@@ -4632,7 +4540,7 @@
         <p:spPr>
           <a:xfrm>
             <a:off x="6229440" y="2791440"/>
-            <a:ext cx="2289600" cy="729000"/>
+            <a:ext cx="2289240" cy="728640"/>
           </a:xfrm>
           <a:prstGeom prst="rect">
             <a:avLst/>
@@ -4667,7 +4575,7 @@
                 <a:latin typeface="Arial"/>
                 <a:ea typeface="DejaVu Sans"/>
               </a:rPr>
-              <a:t>SUBTITLE2</a:t>
+              <a:t>SUBTITLE3</a:t>
             </a:r>
             <a:endParaRPr b="0" lang="en-US" sz="1400" spc="-1" strike="noStrike">
               <a:latin typeface="Arial"/>
@@ -4684,7 +4592,7 @@
         <p:spPr>
           <a:xfrm>
             <a:off x="6229440" y="3574800"/>
-            <a:ext cx="2289600" cy="1162080"/>
+            <a:ext cx="2289240" cy="1161720"/>
           </a:xfrm>
           <a:prstGeom prst="rect">
             <a:avLst/>
@@ -4719,7 +4627,7 @@
                 <a:latin typeface="Arial"/>
                 <a:ea typeface="DejaVu Sans"/>
               </a:rPr>
-              <a:t>TEXT2</a:t>
+              <a:t>TEXT3</a:t>
             </a:r>
             <a:endParaRPr b="0" lang="en-US" sz="1100" spc="-1" strike="noStrike">
               <a:latin typeface="Arial"/>
@@ -4736,7 +4644,7 @@
         <p:spPr>
           <a:xfrm>
             <a:off x="8519760" y="4831560"/>
-            <a:ext cx="484560" cy="226800"/>
+            <a:ext cx="484200" cy="226800"/>
           </a:xfrm>
           <a:prstGeom prst="rect">
             <a:avLst/>
@@ -4788,7 +4696,7 @@
         <p:spPr>
           <a:xfrm>
             <a:off x="457200" y="228600"/>
-            <a:ext cx="8229240" cy="1142640"/>
+            <a:ext cx="8228880" cy="1142280"/>
           </a:xfrm>
           <a:prstGeom prst="rect">
             <a:avLst/>
@@ -4817,7 +4725,11 @@
             </a:pPr>
             <a:r>
               <a:rPr b="0" lang="en-US" sz="1800" spc="-1" strike="noStrike">
-                <a:latin typeface="Arial"/>
+                <a:solidFill>
+                  <a:srgbClr val="000000"/>
+                </a:solidFill>
+                <a:latin typeface="Arial"/>
+                <a:ea typeface="DejaVu Sans"/>
               </a:rPr>
               <a:t>TITLE</a:t>
             </a:r>
@@ -4866,7 +4778,7 @@
         <p:spPr>
           <a:xfrm>
             <a:off x="3601800" y="3271680"/>
-            <a:ext cx="5236200" cy="1320840"/>
+            <a:ext cx="5235840" cy="1320480"/>
           </a:xfrm>
           <a:prstGeom prst="roundRect">
             <a:avLst>
@@ -4904,7 +4816,7 @@
         <p:spPr>
           <a:xfrm>
             <a:off x="6308640" y="1028880"/>
-            <a:ext cx="2532960" cy="2056680"/>
+            <a:ext cx="2532600" cy="2056320"/>
           </a:xfrm>
           <a:prstGeom prst="roundRect">
             <a:avLst>
@@ -4942,7 +4854,7 @@
         <p:spPr>
           <a:xfrm>
             <a:off x="3604320" y="1014480"/>
-            <a:ext cx="2532960" cy="2056680"/>
+            <a:ext cx="2532600" cy="2056320"/>
           </a:xfrm>
           <a:prstGeom prst="roundRect">
             <a:avLst>
@@ -4980,7 +4892,7 @@
         <p:spPr>
           <a:xfrm>
             <a:off x="3696480" y="1059120"/>
-            <a:ext cx="2343240" cy="713520"/>
+            <a:ext cx="2342880" cy="713160"/>
           </a:xfrm>
           <a:prstGeom prst="rect">
             <a:avLst/>
@@ -5042,7 +4954,7 @@
         <p:spPr>
           <a:xfrm>
             <a:off x="3696480" y="1843560"/>
-            <a:ext cx="2343240" cy="1141920"/>
+            <a:ext cx="2342880" cy="1141560"/>
           </a:xfrm>
           <a:prstGeom prst="rect">
             <a:avLst/>
@@ -5104,7 +5016,7 @@
         <p:spPr>
           <a:xfrm>
             <a:off x="6400080" y="1059120"/>
-            <a:ext cx="2340000" cy="713520"/>
+            <a:ext cx="2339640" cy="713160"/>
           </a:xfrm>
           <a:prstGeom prst="rect">
             <a:avLst/>
@@ -5156,7 +5068,7 @@
         <p:spPr>
           <a:xfrm>
             <a:off x="6400080" y="1843560"/>
-            <a:ext cx="2340000" cy="1141920"/>
+            <a:ext cx="2339640" cy="1141560"/>
           </a:xfrm>
           <a:prstGeom prst="rect">
             <a:avLst/>
@@ -5218,7 +5130,7 @@
         <p:spPr>
           <a:xfrm>
             <a:off x="3696480" y="3362040"/>
-            <a:ext cx="5236200" cy="328680"/>
+            <a:ext cx="5235840" cy="328320"/>
           </a:xfrm>
           <a:prstGeom prst="rect">
             <a:avLst/>
@@ -5270,7 +5182,7 @@
         <p:spPr>
           <a:xfrm>
             <a:off x="3696480" y="3713400"/>
-            <a:ext cx="5146560" cy="713520"/>
+            <a:ext cx="5146200" cy="713160"/>
           </a:xfrm>
           <a:prstGeom prst="rect">
             <a:avLst/>
@@ -5332,7 +5244,7 @@
         <p:spPr>
           <a:xfrm>
             <a:off x="384840" y="1028880"/>
-            <a:ext cx="3002400" cy="3564000"/>
+            <a:ext cx="3002040" cy="3563640"/>
           </a:xfrm>
           <a:prstGeom prst="roundRect">
             <a:avLst>
@@ -5396,7 +5308,7 @@
         <p:spPr>
           <a:xfrm>
             <a:off x="8519760" y="4831560"/>
-            <a:ext cx="484560" cy="226800"/>
+            <a:ext cx="484200" cy="226800"/>
           </a:xfrm>
           <a:prstGeom prst="rect">
             <a:avLst/>
@@ -5448,7 +5360,7 @@
         <p:spPr>
           <a:xfrm>
             <a:off x="313200" y="228600"/>
-            <a:ext cx="8457840" cy="685440"/>
+            <a:ext cx="8457480" cy="685080"/>
           </a:xfrm>
           <a:prstGeom prst="rect">
             <a:avLst/>
@@ -5477,7 +5389,11 @@
             </a:pPr>
             <a:r>
               <a:rPr b="0" lang="en-US" sz="1800" spc="-1" strike="noStrike">
-                <a:latin typeface="Arial"/>
+                <a:solidFill>
+                  <a:srgbClr val="000000"/>
+                </a:solidFill>
+                <a:latin typeface="Arial"/>
+                <a:ea typeface="DejaVu Sans"/>
               </a:rPr>
               <a:t>TITLE</a:t>
             </a:r>
@@ -5530,7 +5446,7 @@
         <p:spPr>
           <a:xfrm>
             <a:off x="-877680" y="2245320"/>
-            <a:ext cx="4613040" cy="3604680"/>
+            <a:ext cx="4612680" cy="3604320"/>
           </a:xfrm>
           <a:prstGeom prst="rect">
             <a:avLst/>
@@ -5549,7 +5465,7 @@
         <p:spPr>
           <a:xfrm>
             <a:off x="4157640" y="631080"/>
-            <a:ext cx="899280" cy="899280"/>
+            <a:ext cx="898920" cy="898920"/>
           </a:xfrm>
           <a:prstGeom prst="ellipse">
             <a:avLst/>
@@ -5611,7 +5527,7 @@
         <p:spPr>
           <a:xfrm>
             <a:off x="4157640" y="2127600"/>
-            <a:ext cx="899280" cy="887400"/>
+            <a:ext cx="898920" cy="887040"/>
           </a:xfrm>
           <a:prstGeom prst="ellipse">
             <a:avLst/>
@@ -5673,7 +5589,7 @@
         <p:spPr>
           <a:xfrm>
             <a:off x="4157640" y="3612240"/>
-            <a:ext cx="899280" cy="899280"/>
+            <a:ext cx="898920" cy="898920"/>
           </a:xfrm>
           <a:prstGeom prst="ellipse">
             <a:avLst/>
@@ -5735,7 +5651,7 @@
         <p:spPr>
           <a:xfrm>
             <a:off x="5146560" y="489600"/>
-            <a:ext cx="3578760" cy="550440"/>
+            <a:ext cx="3578400" cy="550080"/>
           </a:xfrm>
           <a:prstGeom prst="rect">
             <a:avLst/>
@@ -5797,7 +5713,7 @@
         <p:spPr>
           <a:xfrm>
             <a:off x="5146560" y="1025280"/>
-            <a:ext cx="3578760" cy="789480"/>
+            <a:ext cx="3578400" cy="789120"/>
           </a:xfrm>
           <a:prstGeom prst="rect">
             <a:avLst/>
@@ -5859,7 +5775,7 @@
         <p:spPr>
           <a:xfrm>
             <a:off x="5142960" y="1985400"/>
-            <a:ext cx="3578760" cy="550440"/>
+            <a:ext cx="3578400" cy="550080"/>
           </a:xfrm>
           <a:prstGeom prst="rect">
             <a:avLst/>
@@ -5911,7 +5827,7 @@
         <p:spPr>
           <a:xfrm>
             <a:off x="5142960" y="2517840"/>
-            <a:ext cx="3578760" cy="843120"/>
+            <a:ext cx="3578400" cy="842760"/>
           </a:xfrm>
           <a:prstGeom prst="rect">
             <a:avLst/>
@@ -5973,7 +5889,7 @@
         <p:spPr>
           <a:xfrm>
             <a:off x="5142960" y="3470760"/>
-            <a:ext cx="3578760" cy="550440"/>
+            <a:ext cx="3578400" cy="550080"/>
           </a:xfrm>
           <a:prstGeom prst="rect">
             <a:avLst/>
@@ -6025,7 +5941,7 @@
         <p:spPr>
           <a:xfrm>
             <a:off x="5142960" y="4003560"/>
-            <a:ext cx="3578760" cy="794520"/>
+            <a:ext cx="3578400" cy="794160"/>
           </a:xfrm>
           <a:prstGeom prst="rect">
             <a:avLst/>
@@ -6087,7 +6003,7 @@
         <p:spPr>
           <a:xfrm>
             <a:off x="8519760" y="4831560"/>
-            <a:ext cx="484560" cy="226800"/>
+            <a:ext cx="484200" cy="226800"/>
           </a:xfrm>
           <a:prstGeom prst="rect">
             <a:avLst/>
@@ -6139,7 +6055,7 @@
         <p:spPr>
           <a:xfrm>
             <a:off x="264600" y="228600"/>
-            <a:ext cx="3657240" cy="2016360"/>
+            <a:ext cx="3656880" cy="2016000"/>
           </a:xfrm>
           <a:prstGeom prst="rect">
             <a:avLst/>
@@ -6168,7 +6084,11 @@
             </a:pPr>
             <a:r>
               <a:rPr b="0" lang="en-US" sz="1800" spc="-1" strike="noStrike">
-                <a:latin typeface="Arial"/>
+                <a:solidFill>
+                  <a:srgbClr val="000000"/>
+                </a:solidFill>
+                <a:latin typeface="Arial"/>
+                <a:ea typeface="DejaVu Sans"/>
               </a:rPr>
               <a:t>TITLE</a:t>
             </a:r>
@@ -6217,7 +6137,7 @@
         <p:spPr>
           <a:xfrm>
             <a:off x="4238640" y="831240"/>
-            <a:ext cx="899280" cy="899280"/>
+            <a:ext cx="898920" cy="898920"/>
           </a:xfrm>
           <a:prstGeom prst="ellipse">
             <a:avLst/>
@@ -6277,7 +6197,7 @@
         <p:spPr>
           <a:xfrm>
             <a:off x="4238640" y="2243880"/>
-            <a:ext cx="899280" cy="887400"/>
+            <a:ext cx="898920" cy="887040"/>
           </a:xfrm>
           <a:prstGeom prst="ellipse">
             <a:avLst/>
@@ -6337,7 +6257,7 @@
         <p:spPr>
           <a:xfrm>
             <a:off x="4238640" y="3667320"/>
-            <a:ext cx="899280" cy="899280"/>
+            <a:ext cx="898920" cy="898920"/>
           </a:xfrm>
           <a:prstGeom prst="ellipse">
             <a:avLst/>
@@ -6397,7 +6317,7 @@
         <p:spPr>
           <a:xfrm>
             <a:off x="5020200" y="797040"/>
-            <a:ext cx="3764520" cy="550440"/>
+            <a:ext cx="3764160" cy="550080"/>
           </a:xfrm>
           <a:prstGeom prst="rect">
             <a:avLst/>
@@ -6459,7 +6379,7 @@
         <p:spPr>
           <a:xfrm>
             <a:off x="5020200" y="1332720"/>
-            <a:ext cx="3764520" cy="789480"/>
+            <a:ext cx="3764160" cy="789120"/>
           </a:xfrm>
           <a:prstGeom prst="rect">
             <a:avLst/>
@@ -6521,7 +6441,7 @@
         <p:spPr>
           <a:xfrm>
             <a:off x="5016600" y="2155320"/>
-            <a:ext cx="3764520" cy="550440"/>
+            <a:ext cx="3764160" cy="550080"/>
           </a:xfrm>
           <a:prstGeom prst="rect">
             <a:avLst/>
@@ -6573,7 +6493,7 @@
         <p:spPr>
           <a:xfrm>
             <a:off x="5016600" y="2687760"/>
-            <a:ext cx="3764520" cy="843120"/>
+            <a:ext cx="3764160" cy="842760"/>
           </a:xfrm>
           <a:prstGeom prst="rect">
             <a:avLst/>
@@ -6635,7 +6555,7 @@
         <p:spPr>
           <a:xfrm>
             <a:off x="5016600" y="3584880"/>
-            <a:ext cx="3764520" cy="550440"/>
+            <a:ext cx="3764160" cy="550080"/>
           </a:xfrm>
           <a:prstGeom prst="rect">
             <a:avLst/>
@@ -6687,7 +6607,7 @@
         <p:spPr>
           <a:xfrm>
             <a:off x="5016600" y="4117320"/>
-            <a:ext cx="3764520" cy="794520"/>
+            <a:ext cx="3764160" cy="794160"/>
           </a:xfrm>
           <a:prstGeom prst="rect">
             <a:avLst/>
@@ -6749,7 +6669,7 @@
         <p:spPr>
           <a:xfrm>
             <a:off x="384840" y="987840"/>
-            <a:ext cx="3687480" cy="3496680"/>
+            <a:ext cx="3687120" cy="3496320"/>
           </a:xfrm>
           <a:prstGeom prst="roundRect">
             <a:avLst>
@@ -6813,7 +6733,7 @@
         <p:spPr>
           <a:xfrm>
             <a:off x="8519760" y="4831560"/>
-            <a:ext cx="484560" cy="226800"/>
+            <a:ext cx="484200" cy="226800"/>
           </a:xfrm>
           <a:prstGeom prst="rect">
             <a:avLst/>
@@ -6865,7 +6785,7 @@
         <p:spPr>
           <a:xfrm>
             <a:off x="300600" y="228600"/>
-            <a:ext cx="8614440" cy="685440"/>
+            <a:ext cx="8614080" cy="685080"/>
           </a:xfrm>
           <a:prstGeom prst="rect">
             <a:avLst/>
@@ -6894,7 +6814,11 @@
             </a:pPr>
             <a:r>
               <a:rPr b="0" lang="en-US" sz="1800" spc="-1" strike="noStrike">
-                <a:latin typeface="Arial"/>
+                <a:solidFill>
+                  <a:srgbClr val="000000"/>
+                </a:solidFill>
+                <a:latin typeface="Arial"/>
+                <a:ea typeface="DejaVu Sans"/>
               </a:rPr>
               <a:t>TITLE</a:t>
             </a:r>
@@ -6943,7 +6867,7 @@
         <p:spPr>
           <a:xfrm>
             <a:off x="0" y="3075480"/>
-            <a:ext cx="9143280" cy="2494800"/>
+            <a:ext cx="9142920" cy="2494440"/>
           </a:xfrm>
           <a:prstGeom prst="roundRect">
             <a:avLst>
@@ -7007,7 +6931,7 @@
         <p:spPr>
           <a:xfrm>
             <a:off x="474840" y="841680"/>
-            <a:ext cx="2556720" cy="2055240"/>
+            <a:ext cx="2556360" cy="2054880"/>
           </a:xfrm>
           <a:prstGeom prst="roundRect">
             <a:avLst>
@@ -7047,7 +6971,7 @@
         <p:spPr>
           <a:xfrm>
             <a:off x="592920" y="973800"/>
-            <a:ext cx="2289600" cy="729000"/>
+            <a:ext cx="2289240" cy="728640"/>
           </a:xfrm>
           <a:prstGeom prst="rect">
             <a:avLst/>
@@ -7099,7 +7023,7 @@
         <p:spPr>
           <a:xfrm>
             <a:off x="592920" y="1757520"/>
-            <a:ext cx="2289600" cy="1162080"/>
+            <a:ext cx="2289240" cy="1161720"/>
           </a:xfrm>
           <a:prstGeom prst="rect">
             <a:avLst/>
@@ -7161,7 +7085,7 @@
         <p:spPr>
           <a:xfrm>
             <a:off x="3309120" y="841680"/>
-            <a:ext cx="2556720" cy="2055240"/>
+            <a:ext cx="2556360" cy="2054880"/>
           </a:xfrm>
           <a:prstGeom prst="roundRect">
             <a:avLst>
@@ -7201,7 +7125,7 @@
         <p:spPr>
           <a:xfrm>
             <a:off x="3426840" y="973800"/>
-            <a:ext cx="2289600" cy="729000"/>
+            <a:ext cx="2289240" cy="728640"/>
           </a:xfrm>
           <a:prstGeom prst="rect">
             <a:avLst/>
@@ -7253,7 +7177,7 @@
         <p:spPr>
           <a:xfrm>
             <a:off x="3426840" y="1757520"/>
-            <a:ext cx="2289600" cy="1162080"/>
+            <a:ext cx="2289240" cy="1161720"/>
           </a:xfrm>
           <a:prstGeom prst="rect">
             <a:avLst/>
@@ -7305,7 +7229,7 @@
         <p:spPr>
           <a:xfrm>
             <a:off x="6143040" y="841680"/>
-            <a:ext cx="2556720" cy="2055240"/>
+            <a:ext cx="2556360" cy="2054880"/>
           </a:xfrm>
           <a:prstGeom prst="roundRect">
             <a:avLst>
@@ -7345,7 +7269,7 @@
         <p:spPr>
           <a:xfrm>
             <a:off x="6260760" y="973800"/>
-            <a:ext cx="2289600" cy="729000"/>
+            <a:ext cx="2289240" cy="728640"/>
           </a:xfrm>
           <a:prstGeom prst="rect">
             <a:avLst/>
@@ -7397,7 +7321,7 @@
         <p:spPr>
           <a:xfrm>
             <a:off x="6260760" y="1757520"/>
-            <a:ext cx="2289600" cy="1162080"/>
+            <a:ext cx="2289240" cy="1161720"/>
           </a:xfrm>
           <a:prstGeom prst="rect">
             <a:avLst/>
@@ -7449,7 +7373,7 @@
         <p:spPr>
           <a:xfrm>
             <a:off x="8519760" y="4831560"/>
-            <a:ext cx="484560" cy="226800"/>
+            <a:ext cx="484200" cy="226800"/>
           </a:xfrm>
           <a:prstGeom prst="rect">
             <a:avLst/>
@@ -7501,7 +7425,7 @@
         <p:spPr>
           <a:xfrm>
             <a:off x="457200" y="349200"/>
-            <a:ext cx="8457840" cy="1022040"/>
+            <a:ext cx="8457480" cy="1021680"/>
           </a:xfrm>
           <a:prstGeom prst="rect">
             <a:avLst/>
@@ -7530,7 +7454,11 @@
             </a:pPr>
             <a:r>
               <a:rPr b="0" lang="en-US" sz="1800" spc="-1" strike="noStrike">
-                <a:latin typeface="Arial"/>
+                <a:solidFill>
+                  <a:srgbClr val="000000"/>
+                </a:solidFill>
+                <a:latin typeface="Arial"/>
+                <a:ea typeface="DejaVu Sans"/>
               </a:rPr>
               <a:t>TITLE</a:t>
             </a:r>
@@ -7586,7 +7514,7 @@
         <p:spPr>
           <a:xfrm>
             <a:off x="5014080" y="250200"/>
-            <a:ext cx="3820320" cy="4624920"/>
+            <a:ext cx="3819960" cy="4624560"/>
           </a:xfrm>
           <a:prstGeom prst="roundRect">
             <a:avLst>
@@ -7652,7 +7580,7 @@
         <p:spPr>
           <a:xfrm>
             <a:off x="329400" y="250200"/>
-            <a:ext cx="4424760" cy="4624920"/>
+            <a:ext cx="4424400" cy="4624560"/>
           </a:xfrm>
           <a:prstGeom prst="roundRect">
             <a:avLst>
@@ -7690,7 +7618,7 @@
         <p:spPr>
           <a:xfrm>
             <a:off x="581760" y="828720"/>
-            <a:ext cx="3901680" cy="550440"/>
+            <a:ext cx="3901320" cy="550080"/>
           </a:xfrm>
           <a:prstGeom prst="rect">
             <a:avLst/>
@@ -7752,7 +7680,7 @@
         <p:spPr>
           <a:xfrm>
             <a:off x="581760" y="1364400"/>
-            <a:ext cx="3901680" cy="789480"/>
+            <a:ext cx="3901320" cy="789120"/>
           </a:xfrm>
           <a:prstGeom prst="rect">
             <a:avLst/>
@@ -7814,7 +7742,7 @@
         <p:spPr>
           <a:xfrm>
             <a:off x="578160" y="2154600"/>
-            <a:ext cx="3901680" cy="550440"/>
+            <a:ext cx="3901320" cy="550080"/>
           </a:xfrm>
           <a:prstGeom prst="rect">
             <a:avLst/>
@@ -7866,7 +7794,7 @@
         <p:spPr>
           <a:xfrm>
             <a:off x="578160" y="2687040"/>
-            <a:ext cx="3901680" cy="843120"/>
+            <a:ext cx="3901320" cy="842760"/>
           </a:xfrm>
           <a:prstGeom prst="rect">
             <a:avLst/>
@@ -7928,7 +7856,7 @@
         <p:spPr>
           <a:xfrm>
             <a:off x="578160" y="3482280"/>
-            <a:ext cx="3901680" cy="550440"/>
+            <a:ext cx="3901320" cy="550080"/>
           </a:xfrm>
           <a:prstGeom prst="rect">
             <a:avLst/>
@@ -7980,7 +7908,7 @@
         <p:spPr>
           <a:xfrm>
             <a:off x="578160" y="4015080"/>
-            <a:ext cx="3901680" cy="794520"/>
+            <a:ext cx="3901320" cy="794160"/>
           </a:xfrm>
           <a:prstGeom prst="rect">
             <a:avLst/>
@@ -8042,7 +7970,7 @@
         <p:spPr>
           <a:xfrm>
             <a:off x="8519760" y="4831560"/>
-            <a:ext cx="484560" cy="226800"/>
+            <a:ext cx="484200" cy="226800"/>
           </a:xfrm>
           <a:prstGeom prst="rect">
             <a:avLst/>
@@ -8094,7 +8022,7 @@
         <p:spPr>
           <a:xfrm>
             <a:off x="493200" y="300600"/>
-            <a:ext cx="4078440" cy="842040"/>
+            <a:ext cx="4078080" cy="841680"/>
           </a:xfrm>
           <a:prstGeom prst="rect">
             <a:avLst/>
@@ -8123,7 +8051,11 @@
             </a:pPr>
             <a:r>
               <a:rPr b="0" lang="en-US" sz="1800" spc="-1" strike="noStrike">
-                <a:latin typeface="Arial"/>
+                <a:solidFill>
+                  <a:srgbClr val="000000"/>
+                </a:solidFill>
+                <a:latin typeface="Arial"/>
+                <a:ea typeface="DejaVu Sans"/>
               </a:rPr>
               <a:t>TITLE</a:t>
             </a:r>
@@ -8172,7 +8104,7 @@
         <p:spPr>
           <a:xfrm>
             <a:off x="186840" y="178200"/>
-            <a:ext cx="8769960" cy="4757760"/>
+            <a:ext cx="8769600" cy="4757400"/>
           </a:xfrm>
           <a:prstGeom prst="roundRect">
             <a:avLst>
@@ -8210,7 +8142,7 @@
         <p:spPr>
           <a:xfrm>
             <a:off x="460080" y="622080"/>
-            <a:ext cx="6925680" cy="3306600"/>
+            <a:ext cx="6925320" cy="3306240"/>
           </a:xfrm>
           <a:prstGeom prst="rect">
             <a:avLst/>
@@ -8266,7 +8198,7 @@
         <p:spPr>
           <a:xfrm>
             <a:off x="5753880" y="2557440"/>
-            <a:ext cx="4009680" cy="3133080"/>
+            <a:ext cx="4009320" cy="3132720"/>
           </a:xfrm>
           <a:prstGeom prst="rect">
             <a:avLst/>
